--- a/Prezentace/3. ročník/PGM_01_soubory_opakovani.pptx
+++ b/Prezentace/3. ročník/PGM_01_soubory_opakovani.pptx
@@ -896,7 +896,7 @@
           <a:p>
             <a:fld id="{0F4CBD7E-8EC4-40D0-831C-FC6BF586B823}" type="datetimeFigureOut">
               <a:rPr lang="cs-CZ" smtClean="0"/>
-              <a:t>02.09.2026</a:t>
+              <a:t>14.09.2026</a:t>
             </a:fld>
             <a:endParaRPr lang="cs-CZ"/>
           </a:p>
@@ -1401,7 +1401,7 @@
           <a:p>
             <a:fld id="{8D5D83F1-BF6E-4A98-8153-BAC9ABDE7CE3}" type="datetimeFigureOut">
               <a:rPr lang="en-US" dirty="0"/>
-              <a:t>9/2/2026</a:t>
+              <a:t>9/14/2026</a:t>
             </a:fld>
             <a:endParaRPr lang="en-US" dirty="0"/>
           </a:p>
@@ -1619,7 +1619,7 @@
           <a:p>
             <a:fld id="{ED9BE5A2-57A1-4629-B29D-D386573AF9F3}" type="datetimeFigureOut">
               <a:rPr lang="en-US" dirty="0"/>
-              <a:t>9/2/2026</a:t>
+              <a:t>9/14/2026</a:t>
             </a:fld>
             <a:endParaRPr lang="en-US" dirty="0"/>
           </a:p>
@@ -1831,7 +1831,7 @@
           <a:p>
             <a:fld id="{A3A72485-1B57-41B4-A998-97848CC136C2}" type="datetimeFigureOut">
               <a:rPr lang="en-US" dirty="0"/>
-              <a:t>9/2/2026</a:t>
+              <a:t>9/14/2026</a:t>
             </a:fld>
             <a:endParaRPr lang="en-US" dirty="0"/>
           </a:p>
@@ -2033,7 +2033,7 @@
           <a:p>
             <a:fld id="{BA576E92-E5C8-4FF8-B2BE-A516F6A1724E}" type="datetimeFigureOut">
               <a:rPr lang="en-US" dirty="0"/>
-              <a:t>9/2/2026</a:t>
+              <a:t>9/14/2026</a:t>
             </a:fld>
             <a:endParaRPr lang="en-US" dirty="0"/>
           </a:p>
@@ -2316,7 +2316,7 @@
           <a:p>
             <a:fld id="{06DDB232-C681-46A2-B21F-2BD21E9CA134}" type="datetimeFigureOut">
               <a:rPr lang="en-US" dirty="0"/>
-              <a:t>9/2/2026</a:t>
+              <a:t>9/14/2026</a:t>
             </a:fld>
             <a:endParaRPr lang="en-US" dirty="0"/>
           </a:p>
@@ -2585,7 +2585,7 @@
           <a:p>
             <a:fld id="{30ABE26E-66F9-4E5F-9E07-CA7CDB200281}" type="datetimeFigureOut">
               <a:rPr lang="en-US" dirty="0"/>
-              <a:t>9/2/2026</a:t>
+              <a:t>9/14/2026</a:t>
             </a:fld>
             <a:endParaRPr lang="en-US" dirty="0"/>
           </a:p>
@@ -3005,7 +3005,7 @@
           <a:p>
             <a:fld id="{85A1A01C-F286-49E7-998E-3D5BB613F99A}" type="datetimeFigureOut">
               <a:rPr lang="en-US" dirty="0"/>
-              <a:t>9/2/2026</a:t>
+              <a:t>9/14/2026</a:t>
             </a:fld>
             <a:endParaRPr lang="en-US" dirty="0"/>
           </a:p>
@@ -3150,7 +3150,7 @@
           <a:p>
             <a:fld id="{B7CC2C0A-F771-42D9-AAB0-90C3A2B0FEAD}" type="datetimeFigureOut">
               <a:rPr lang="en-US" dirty="0"/>
-              <a:t>9/2/2026</a:t>
+              <a:t>9/14/2026</a:t>
             </a:fld>
             <a:endParaRPr lang="en-US" dirty="0"/>
           </a:p>
@@ -3267,7 +3267,7 @@
           <a:p>
             <a:fld id="{2CA2A270-409D-4410-9649-B7481576446C}" type="datetimeFigureOut">
               <a:rPr lang="en-US" dirty="0"/>
-              <a:t>9/2/2026</a:t>
+              <a:t>9/14/2026</a:t>
             </a:fld>
             <a:endParaRPr lang="en-US" dirty="0"/>
           </a:p>
@@ -3584,7 +3584,7 @@
           <a:p>
             <a:fld id="{42200AA3-798A-4433-8927-6E115914B6EF}" type="datetimeFigureOut">
               <a:rPr lang="en-US" dirty="0"/>
-              <a:t>9/2/2026</a:t>
+              <a:t>9/14/2026</a:t>
             </a:fld>
             <a:endParaRPr lang="en-US" dirty="0"/>
           </a:p>
@@ -3876,7 +3876,7 @@
           <a:p>
             <a:fld id="{36322871-0F85-43DC-99D7-CA8E7437E2EC}" type="datetimeFigureOut">
               <a:rPr lang="en-US" dirty="0"/>
-              <a:t>9/2/2026</a:t>
+              <a:t>9/14/2026</a:t>
             </a:fld>
             <a:endParaRPr lang="en-US" dirty="0"/>
           </a:p>
@@ -4119,7 +4119,7 @@
           <a:p>
             <a:fld id="{E857DF4D-D974-434D-9D64-40B7405DF5F0}" type="datetimeFigureOut">
               <a:rPr lang="en-US" dirty="0"/>
-              <a:t>9/2/2026</a:t>
+              <a:t>9/14/2026</a:t>
             </a:fld>
             <a:endParaRPr lang="en-US" dirty="0"/>
           </a:p>
@@ -4715,7 +4715,7 @@
                   <a:spcPts val="600"/>
                 </a:spcAft>
               </a:pPr>
-              <a:t>9/2/2026</a:t>
+              <a:t>9/14/2026</a:t>
             </a:fld>
             <a:endParaRPr lang="en-US"/>
           </a:p>
@@ -5042,8 +5042,12 @@
               </a:lnSpc>
             </a:pPr>
             <a:r>
-              <a:rPr lang="cs-CZ" sz="1800"/>
-              <a:t>Součást knihovny System.IO </a:t>
+              <a:rPr lang="cs-CZ" sz="1800" dirty="0"/>
+              <a:t>Součást knihovny </a:t>
+            </a:r>
+            <a:r>
+              <a:rPr lang="cs-CZ" sz="1800" b="1" dirty="0"/>
+              <a:t>System.IO </a:t>
             </a:r>
           </a:p>
           <a:p>
@@ -5053,7 +5057,7 @@
               </a:lnSpc>
             </a:pPr>
             <a:r>
-              <a:rPr lang="cs-CZ" sz="1800"/>
+              <a:rPr lang="cs-CZ" sz="1800" dirty="0"/>
               <a:t>Vytváří standard pro přenos souborů v datových proudech</a:t>
             </a:r>
           </a:p>
@@ -5064,7 +5068,7 @@
               </a:lnSpc>
             </a:pPr>
             <a:r>
-              <a:rPr lang="cs-CZ" sz="1800"/>
+              <a:rPr lang="cs-CZ" sz="1800" dirty="0"/>
               <a:t>Abstraktní třída umožňující čtení/zápis z různých zdrojů (soubor, paměť, …)</a:t>
             </a:r>
           </a:p>
@@ -5075,7 +5079,7 @@
               </a:lnSpc>
             </a:pPr>
             <a:r>
-              <a:rPr lang="cs-CZ" sz="1800"/>
+              <a:rPr lang="cs-CZ" sz="1800" dirty="0"/>
               <a:t>Následující třídy implementují třídu Stream podle konkrétního zdroje</a:t>
             </a:r>
           </a:p>
@@ -5086,11 +5090,11 @@
               </a:lnSpc>
             </a:pPr>
             <a:r>
-              <a:rPr lang="cs-CZ" sz="1800" err="1"/>
+              <a:rPr lang="cs-CZ" sz="1800" b="1" dirty="0" err="1"/>
               <a:t>FileStream</a:t>
             </a:r>
             <a:r>
-              <a:rPr lang="cs-CZ" sz="1800"/>
+              <a:rPr lang="cs-CZ" sz="1800" dirty="0"/>
               <a:t> – fyzické soubory</a:t>
             </a:r>
           </a:p>
@@ -5101,11 +5105,11 @@
               </a:lnSpc>
             </a:pPr>
             <a:r>
-              <a:rPr lang="cs-CZ" sz="1800" err="1"/>
+              <a:rPr lang="cs-CZ" sz="1800" b="1" dirty="0" err="1"/>
               <a:t>MemoryStream</a:t>
             </a:r>
             <a:r>
-              <a:rPr lang="cs-CZ" sz="1800"/>
+              <a:rPr lang="cs-CZ" sz="1800" dirty="0"/>
               <a:t> – operační paměť</a:t>
             </a:r>
           </a:p>
@@ -5116,19 +5120,19 @@
               </a:lnSpc>
             </a:pPr>
             <a:r>
-              <a:rPr lang="cs-CZ" sz="1800" err="1"/>
+              <a:rPr lang="cs-CZ" sz="1800" b="1" dirty="0" err="1"/>
               <a:t>BufferedStream</a:t>
             </a:r>
             <a:r>
-              <a:rPr lang="cs-CZ" sz="1800"/>
+              <a:rPr lang="cs-CZ" sz="1800" dirty="0"/>
               <a:t> – jiné proudy (</a:t>
             </a:r>
             <a:r>
-              <a:rPr lang="cs-CZ" sz="1800" err="1"/>
+              <a:rPr lang="cs-CZ" sz="1800" dirty="0" err="1"/>
               <a:t>streams</a:t>
             </a:r>
             <a:r>
-              <a:rPr lang="cs-CZ" sz="1800"/>
+              <a:rPr lang="cs-CZ" sz="1800" dirty="0"/>
               <a:t>)</a:t>
             </a:r>
           </a:p>
@@ -5139,18 +5143,18 @@
               </a:lnSpc>
             </a:pPr>
             <a:r>
-              <a:rPr lang="cs-CZ" sz="1800" err="1"/>
+              <a:rPr lang="cs-CZ" sz="1800" b="1" dirty="0" err="1"/>
               <a:t>NetworkStream</a:t>
             </a:r>
             <a:r>
-              <a:rPr lang="cs-CZ" sz="1800"/>
+              <a:rPr lang="cs-CZ" sz="1800" dirty="0"/>
               <a:t> – síťové </a:t>
             </a:r>
             <a:r>
-              <a:rPr lang="cs-CZ" sz="1800" err="1"/>
+              <a:rPr lang="cs-CZ" sz="1800" dirty="0" err="1"/>
               <a:t>sockety</a:t>
             </a:r>
-            <a:endParaRPr lang="cs-CZ" sz="1800"/>
+            <a:endParaRPr lang="cs-CZ" sz="1800" dirty="0"/>
           </a:p>
           <a:p>
             <a:pPr>
@@ -5159,11 +5163,11 @@
               </a:lnSpc>
             </a:pPr>
             <a:r>
-              <a:rPr lang="cs-CZ" sz="1800" err="1"/>
+              <a:rPr lang="cs-CZ" sz="1800" b="1" dirty="0" err="1"/>
               <a:t>PipeStream</a:t>
             </a:r>
             <a:r>
-              <a:rPr lang="cs-CZ" sz="1800"/>
+              <a:rPr lang="cs-CZ" sz="1800" dirty="0"/>
               <a:t> - procesy</a:t>
             </a:r>
           </a:p>
@@ -5237,7 +5241,7 @@
                   <a:spcPts val="600"/>
                 </a:spcAft>
               </a:pPr>
-              <a:t>9/2/2026</a:t>
+              <a:t>9/14/2026</a:t>
             </a:fld>
             <a:endParaRPr lang="en-US"/>
           </a:p>
@@ -5509,15 +5513,6 @@
           <a:solidFill>
             <a:srgbClr val="FFFFFF"/>
           </a:solidFill>
-          <a:extLst>
-            <a:ext uri="{909E8E84-426E-40DD-AFC4-6F175D3DCCD1}">
-              <a14:hiddenFill xmlns:a14="http://schemas.microsoft.com/office/drawing/2010/main">
-                <a:solidFill>
-                  <a:srgbClr val="FFFFFF"/>
-                </a:solidFill>
-              </a14:hiddenFill>
-            </a:ext>
-          </a:extLst>
         </p:spPr>
       </p:pic>
       <p:sp>
@@ -5558,7 +5553,7 @@
                   <a:spcPts val="600"/>
                 </a:spcAft>
               </a:pPr>
-              <a:t>9/2/2026</a:t>
+              <a:t>9/14/2026</a:t>
             </a:fld>
             <a:endParaRPr lang="en-US"/>
           </a:p>
@@ -6195,7 +6190,7 @@
                   <a:spcPts val="600"/>
                 </a:spcAft>
               </a:pPr>
-              <a:t>9/2/2026</a:t>
+              <a:t>9/14/2026</a:t>
             </a:fld>
             <a:endParaRPr lang="en-US"/>
           </a:p>
@@ -6468,7 +6463,7 @@
                   <a:spcPts val="600"/>
                 </a:spcAft>
               </a:pPr>
-              <a:t>9/2/2026</a:t>
+              <a:t>9/14/2026</a:t>
             </a:fld>
             <a:endParaRPr lang="en-US"/>
           </a:p>
@@ -7067,21 +7062,6 @@
 </file>
 
 <file path=customXml/item1.xml><?xml version="1.0" encoding="utf-8"?>
-<p:properties xmlns:p="http://schemas.microsoft.com/office/2006/metadata/properties" xmlns:xsi="http://www.w3.org/2001/XMLSchema-instance" xmlns:pc="http://schemas.microsoft.com/office/infopath/2007/PartnerControls">
-  <documentManagement/>
-</p:properties>
-</file>
-
-<file path=customXml/item2.xml><?xml version="1.0" encoding="utf-8"?>
-<?mso-contentType ?>
-<FormTemplates xmlns="http://schemas.microsoft.com/sharepoint/v3/contenttype/forms">
-  <Display>DocumentLibraryForm</Display>
-  <Edit>DocumentLibraryForm</Edit>
-  <New>DocumentLibraryForm</New>
-</FormTemplates>
-</file>
-
-<file path=customXml/item3.xml><?xml version="1.0" encoding="utf-8"?>
 <ct:contentTypeSchema xmlns:ct="http://schemas.microsoft.com/office/2006/metadata/contentType" xmlns:ma="http://schemas.microsoft.com/office/2006/metadata/properties/metaAttributes" ct:_="" ma:_="" ma:contentTypeName="Dokument" ma:contentTypeID="0x010100835861FD81B3EE45AAC4C81C5640ECE7" ma:contentTypeVersion="4" ma:contentTypeDescription="Vytvoří nový dokument" ma:contentTypeScope="" ma:versionID="9ef8b661d8eb31bc59fd4d064638f75c">
   <xsd:schema xmlns:xsd="http://www.w3.org/2001/XMLSchema" xmlns:xs="http://www.w3.org/2001/XMLSchema" xmlns:p="http://schemas.microsoft.com/office/2006/metadata/properties" xmlns:ns2="c8cc7701-65b3-4efe-89ae-c871b5b7820b" targetNamespace="http://schemas.microsoft.com/office/2006/metadata/properties" ma:root="true" ma:fieldsID="72de23a8390aadfc4041f33935428244" ns2:_="">
     <xsd:import namespace="c8cc7701-65b3-4efe-89ae-c871b5b7820b"/>
@@ -7225,24 +7205,22 @@
 </ct:contentTypeSchema>
 </file>
 
-<file path=customXml/itemProps1.xml><?xml version="1.0" encoding="utf-8"?>
-<ds:datastoreItem xmlns:ds="http://schemas.openxmlformats.org/officeDocument/2006/customXml" ds:itemID="{C03DA256-BEF3-4703-AFA0-C69E0571B414}">
-  <ds:schemaRefs>
-    <ds:schemaRef ds:uri="http://schemas.microsoft.com/office/2006/metadata/properties"/>
-    <ds:schemaRef ds:uri="http://schemas.microsoft.com/office/infopath/2007/PartnerControls"/>
-  </ds:schemaRefs>
-</ds:datastoreItem>
+<file path=customXml/item2.xml><?xml version="1.0" encoding="utf-8"?>
+<?mso-contentType ?>
+<FormTemplates xmlns="http://schemas.microsoft.com/sharepoint/v3/contenttype/forms">
+  <Display>DocumentLibraryForm</Display>
+  <Edit>DocumentLibraryForm</Edit>
+  <New>DocumentLibraryForm</New>
+</FormTemplates>
 </file>
 
-<file path=customXml/itemProps2.xml><?xml version="1.0" encoding="utf-8"?>
-<ds:datastoreItem xmlns:ds="http://schemas.openxmlformats.org/officeDocument/2006/customXml" ds:itemID="{A503566E-0711-4326-999B-C5E7A9DBF8EA}">
-  <ds:schemaRefs>
-    <ds:schemaRef ds:uri="http://schemas.microsoft.com/sharepoint/v3/contenttype/forms"/>
-  </ds:schemaRefs>
-</ds:datastoreItem>
+<file path=customXml/item3.xml><?xml version="1.0" encoding="utf-8"?>
+<p:properties xmlns:p="http://schemas.microsoft.com/office/2006/metadata/properties" xmlns:xsi="http://www.w3.org/2001/XMLSchema-instance" xmlns:pc="http://schemas.microsoft.com/office/infopath/2007/PartnerControls">
+  <documentManagement/>
+</p:properties>
 </file>
 
-<file path=customXml/itemProps3.xml><?xml version="1.0" encoding="utf-8"?>
+<file path=customXml/itemProps1.xml><?xml version="1.0" encoding="utf-8"?>
 <ds:datastoreItem xmlns:ds="http://schemas.openxmlformats.org/officeDocument/2006/customXml" ds:itemID="{5B069700-2712-4E72-B11D-CD465575C378}">
   <ds:schemaRefs>
     <ds:schemaRef ds:uri="http://schemas.microsoft.com/office/2006/metadata/contentType"/>
@@ -7258,4 +7236,21 @@
     <ds:schemaRef ds:uri="http://schemas.microsoft.com/internal/obd"/>
   </ds:schemaRefs>
 </ds:datastoreItem>
+</file>
+
+<file path=customXml/itemProps2.xml><?xml version="1.0" encoding="utf-8"?>
+<ds:datastoreItem xmlns:ds="http://schemas.openxmlformats.org/officeDocument/2006/customXml" ds:itemID="{A503566E-0711-4326-999B-C5E7A9DBF8EA}">
+  <ds:schemaRefs>
+    <ds:schemaRef ds:uri="http://schemas.microsoft.com/sharepoint/v3/contenttype/forms"/>
+  </ds:schemaRefs>
+</ds:datastoreItem>
+</file>
+
+<file path=customXml/itemProps3.xml><?xml version="1.0" encoding="utf-8"?>
+<ds:datastoreItem xmlns:ds="http://schemas.openxmlformats.org/officeDocument/2006/customXml" ds:itemID="{C03DA256-BEF3-4703-AFA0-C69E0571B414}">
+  <ds:schemaRefs>
+    <ds:schemaRef ds:uri="http://schemas.microsoft.com/office/2006/metadata/properties"/>
+    <ds:schemaRef ds:uri="http://schemas.microsoft.com/office/infopath/2007/PartnerControls"/>
+  </ds:schemaRefs>
+</ds:datastoreItem>
 </file>